--- a/AKFA_Dilerlik_Investor_Prezentatsiyasi.pptx
+++ b/AKFA_Dilerlik_Investor_Prezentatsiyasi.pptx
@@ -2123,7 +2123,7 @@
                   <c:v>2.59</c:v>
                 </c:pt>
                 <c:pt idx="3">
-                  <c:v>9.04</c:v>
+                  <c:v>3.616</c:v>
                 </c:pt>
               </c:numCache>
             </c:numRef>
@@ -5415,7 +5415,7 @@
       </p:grpSpPr>
       <p:pic>
         <p:nvPicPr>
-          <p:cNvPr id="2" name="Image 0" descr="C:\Users\WECAN\Downloads\akfa invest\assets\hero-bg.jpg">    </p:cNvPr>
+          <p:cNvPr id="2" name="Image 0" descr="C:\Users\WECAN\Downloads\akfa invest 6040 new\assets\hero-bg.jpg">    </p:cNvPr>
           <p:cNvPicPr>
             <a:picLocks noChangeAspect="1"/>
           </p:cNvPicPr>
@@ -20573,7 +20573,7 @@
                   <a:srgbClr val="10B981"/>
                 </a:solidFill>
               </a:rPr>
-              <a:t>9.04 mlrd UZS</a:t>
+              <a:t>3.616 mlrd UZS</a:t>
             </a:r>
             <a:endParaRPr lang="en-US" sz="2000" dirty="0"/>
           </a:p>
@@ -20609,7 +20609,7 @@
                   <a:srgbClr val="B9BEC2"/>
                 </a:solidFill>
               </a:rPr>
-              <a:t>2025 ga nisbatan: +249% o‘sish</a:t>
+              <a:t>2025 ga nisbatan: +39.5% o‘sish</a:t>
             </a:r>
             <a:endParaRPr lang="en-US" sz="1000" dirty="0"/>
           </a:p>
@@ -20708,7 +20708,7 @@
                   <a:srgbClr val="EE3526"/>
                 </a:solidFill>
               </a:rPr>
-              <a:t>3.28%</a:t>
+              <a:t>1.31%</a:t>
             </a:r>
             <a:endParaRPr lang="en-US" sz="2000" dirty="0"/>
           </a:p>
@@ -21561,7 +21561,7 @@
                           <a:ea typeface="Calibri" pitchFamily="34" charset="-122"/>
                           <a:cs typeface="Calibri" pitchFamily="34" charset="-120"/>
                         </a:rPr>
-                        <a:t>420 000 000</a:t>
+                        <a:t>168 000 000</a:t>
                       </a:r>
                       <a:endParaRPr lang="en-US" sz="950" dirty="0">
                         <a:latin typeface="Calibri" charset="0"/>
@@ -21629,7 +21629,7 @@
                           <a:ea typeface="Calibri" pitchFamily="34" charset="-122"/>
                           <a:cs typeface="Calibri" pitchFamily="34" charset="-120"/>
                         </a:rPr>
-                        <a:t>2.63%</a:t>
+                        <a:t>1.05%</a:t>
                       </a:r>
                       <a:endParaRPr lang="en-US" sz="950" dirty="0">
                         <a:latin typeface="Calibri" charset="0"/>
@@ -21697,7 +21697,7 @@
                           <a:ea typeface="Calibri" pitchFamily="34" charset="-122"/>
                           <a:cs typeface="Calibri" pitchFamily="34" charset="-120"/>
                         </a:rPr>
-                        <a:t>753.3 mln o‘rtacha daromad</a:t>
+                        <a:t>301.3 mln o‘rtacha daromad</a:t>
                       </a:r>
                       <a:endParaRPr lang="en-US" sz="950" dirty="0">
                         <a:latin typeface="Calibri" charset="0"/>
@@ -21903,7 +21903,7 @@
                           <a:ea typeface="Calibri" pitchFamily="34" charset="-122"/>
                           <a:cs typeface="Calibri" pitchFamily="34" charset="-120"/>
                         </a:rPr>
-                        <a:t>460 000 000</a:t>
+                        <a:t>184 000 000</a:t>
                       </a:r>
                       <a:endParaRPr lang="en-US" sz="950" dirty="0">
                         <a:latin typeface="Calibri" charset="0"/>
@@ -21971,7 +21971,7 @@
                           <a:ea typeface="Calibri" pitchFamily="34" charset="-122"/>
                           <a:cs typeface="Calibri" pitchFamily="34" charset="-120"/>
                         </a:rPr>
-                        <a:t>2.71%</a:t>
+                        <a:t>1.08%</a:t>
                       </a:r>
                       <a:endParaRPr lang="en-US" sz="950" dirty="0">
                         <a:latin typeface="Calibri" charset="0"/>
@@ -22245,7 +22245,7 @@
                           <a:ea typeface="Calibri" pitchFamily="34" charset="-122"/>
                           <a:cs typeface="Calibri" pitchFamily="34" charset="-120"/>
                         </a:rPr>
-                        <a:t>500 000 000</a:t>
+                        <a:t>200 000 000</a:t>
                       </a:r>
                       <a:endParaRPr lang="en-US" sz="950" dirty="0">
                         <a:latin typeface="Calibri" charset="0"/>
@@ -22313,7 +22313,7 @@
                           <a:ea typeface="Calibri" pitchFamily="34" charset="-122"/>
                           <a:cs typeface="Calibri" pitchFamily="34" charset="-120"/>
                         </a:rPr>
-                        <a:t>2.78%</a:t>
+                        <a:t>1.11%</a:t>
                       </a:r>
                       <a:endParaRPr lang="en-US" sz="950" dirty="0">
                         <a:latin typeface="Calibri" charset="0"/>
@@ -22587,7 +22587,7 @@
                           <a:ea typeface="Calibri" pitchFamily="34" charset="-122"/>
                           <a:cs typeface="Calibri" pitchFamily="34" charset="-120"/>
                         </a:rPr>
-                        <a:t>620 000 000</a:t>
+                        <a:t>248 000 000</a:t>
                       </a:r>
                       <a:endParaRPr lang="en-US" sz="950" dirty="0">
                         <a:latin typeface="Calibri" charset="0"/>
@@ -22655,7 +22655,7 @@
                           <a:ea typeface="Calibri" pitchFamily="34" charset="-122"/>
                           <a:cs typeface="Calibri" pitchFamily="34" charset="-120"/>
                         </a:rPr>
-                        <a:t>2.95%</a:t>
+                        <a:t>1.18%</a:t>
                       </a:r>
                       <a:endParaRPr lang="en-US" sz="950" dirty="0">
                         <a:latin typeface="Calibri" charset="0"/>
@@ -22929,7 +22929,7 @@
                           <a:ea typeface="Calibri" pitchFamily="34" charset="-122"/>
                           <a:cs typeface="Calibri" pitchFamily="34" charset="-120"/>
                         </a:rPr>
-                        <a:t>820 000 000</a:t>
+                        <a:t>328 000 000</a:t>
                       </a:r>
                       <a:endParaRPr lang="en-US" sz="950" dirty="0">
                         <a:latin typeface="Calibri" charset="0"/>
@@ -22997,7 +22997,7 @@
                           <a:ea typeface="Calibri" pitchFamily="34" charset="-122"/>
                           <a:cs typeface="Calibri" pitchFamily="34" charset="-120"/>
                         </a:rPr>
-                        <a:t>3.42%</a:t>
+                        <a:t>1.37%</a:t>
                       </a:r>
                       <a:endParaRPr lang="en-US" sz="950" dirty="0">
                         <a:latin typeface="Calibri" charset="0"/>
@@ -23271,7 +23271,7 @@
                           <a:ea typeface="Calibri" pitchFamily="34" charset="-122"/>
                           <a:cs typeface="Calibri" pitchFamily="34" charset="-120"/>
                         </a:rPr>
-                        <a:t>900 000 000</a:t>
+                        <a:t>360 000 000</a:t>
                       </a:r>
                       <a:endParaRPr lang="en-US" sz="950" dirty="0">
                         <a:latin typeface="Calibri" charset="0"/>
@@ -23339,7 +23339,7 @@
                           <a:ea typeface="Calibri" pitchFamily="34" charset="-122"/>
                           <a:cs typeface="Calibri" pitchFamily="34" charset="-120"/>
                         </a:rPr>
-                        <a:t>3.46%</a:t>
+                        <a:t>1.38%</a:t>
                       </a:r>
                       <a:endParaRPr lang="en-US" sz="950" dirty="0">
                         <a:latin typeface="Calibri" charset="0"/>
@@ -23613,7 +23613,7 @@
                           <a:ea typeface="Calibri" pitchFamily="34" charset="-122"/>
                           <a:cs typeface="Calibri" pitchFamily="34" charset="-120"/>
                         </a:rPr>
-                        <a:t>1 040 000 000</a:t>
+                        <a:t>416 000 000</a:t>
                       </a:r>
                       <a:endParaRPr lang="en-US" sz="950" dirty="0">
                         <a:latin typeface="Calibri" charset="0"/>
@@ -23681,7 +23681,7 @@
                           <a:ea typeface="Calibri" pitchFamily="34" charset="-122"/>
                           <a:cs typeface="Calibri" pitchFamily="34" charset="-120"/>
                         </a:rPr>
-                        <a:t>3.85%</a:t>
+                        <a:t>1.54%</a:t>
                       </a:r>
                       <a:endParaRPr lang="en-US" sz="950" dirty="0">
                         <a:latin typeface="Calibri" charset="0"/>
@@ -23955,7 +23955,7 @@
                           <a:ea typeface="Calibri" pitchFamily="34" charset="-122"/>
                           <a:cs typeface="Calibri" pitchFamily="34" charset="-120"/>
                         </a:rPr>
-                        <a:t>1 060 000 000</a:t>
+                        <a:t>424 000 000</a:t>
                       </a:r>
                       <a:endParaRPr lang="en-US" sz="950" dirty="0">
                         <a:latin typeface="Calibri" charset="0"/>
@@ -24023,7 +24023,7 @@
                           <a:ea typeface="Calibri" pitchFamily="34" charset="-122"/>
                           <a:cs typeface="Calibri" pitchFamily="34" charset="-120"/>
                         </a:rPr>
-                        <a:t>3.53%</a:t>
+                        <a:t>1.41%</a:t>
                       </a:r>
                       <a:endParaRPr lang="en-US" sz="950" dirty="0">
                         <a:latin typeface="Calibri" charset="0"/>
@@ -24297,7 +24297,7 @@
                           <a:ea typeface="Calibri" pitchFamily="34" charset="-122"/>
                           <a:cs typeface="Calibri" pitchFamily="34" charset="-120"/>
                         </a:rPr>
-                        <a:t>1 060 000 000</a:t>
+                        <a:t>424 000 000</a:t>
                       </a:r>
                       <a:endParaRPr lang="en-US" sz="950" dirty="0">
                         <a:latin typeface="Calibri" charset="0"/>
@@ -24365,7 +24365,7 @@
                           <a:ea typeface="Calibri" pitchFamily="34" charset="-122"/>
                           <a:cs typeface="Calibri" pitchFamily="34" charset="-120"/>
                         </a:rPr>
-                        <a:t>3.53%</a:t>
+                        <a:t>1.41%</a:t>
                       </a:r>
                       <a:endParaRPr lang="en-US" sz="950" dirty="0">
                         <a:latin typeface="Calibri" charset="0"/>
@@ -24639,7 +24639,7 @@
                           <a:ea typeface="Calibri" pitchFamily="34" charset="-122"/>
                           <a:cs typeface="Calibri" pitchFamily="34" charset="-120"/>
                         </a:rPr>
-                        <a:t>900 000 000</a:t>
+                        <a:t>360 000 000</a:t>
                       </a:r>
                       <a:endParaRPr lang="en-US" sz="950" dirty="0">
                         <a:latin typeface="Calibri" charset="0"/>
@@ -24707,7 +24707,7 @@
                           <a:ea typeface="Calibri" pitchFamily="34" charset="-122"/>
                           <a:cs typeface="Calibri" pitchFamily="34" charset="-120"/>
                         </a:rPr>
-                        <a:t>3.46%</a:t>
+                        <a:t>1.38%</a:t>
                       </a:r>
                       <a:endParaRPr lang="en-US" sz="950" dirty="0">
                         <a:latin typeface="Calibri" charset="0"/>
@@ -24981,7 +24981,7 @@
                           <a:ea typeface="Calibri" pitchFamily="34" charset="-122"/>
                           <a:cs typeface="Calibri" pitchFamily="34" charset="-120"/>
                         </a:rPr>
-                        <a:t>780 000 000</a:t>
+                        <a:t>312 000 000</a:t>
                       </a:r>
                       <a:endParaRPr lang="en-US" sz="950" dirty="0">
                         <a:latin typeface="Calibri" charset="0"/>
@@ -25049,7 +25049,7 @@
                           <a:ea typeface="Calibri" pitchFamily="34" charset="-122"/>
                           <a:cs typeface="Calibri" pitchFamily="34" charset="-120"/>
                         </a:rPr>
-                        <a:t>3.39%</a:t>
+                        <a:t>1.36%</a:t>
                       </a:r>
                       <a:endParaRPr lang="en-US" sz="950" dirty="0">
                         <a:latin typeface="Calibri" charset="0"/>
@@ -25323,7 +25323,7 @@
                           <a:ea typeface="Calibri" pitchFamily="34" charset="-122"/>
                           <a:cs typeface="Calibri" pitchFamily="34" charset="-120"/>
                         </a:rPr>
-                        <a:t>480 000 000</a:t>
+                        <a:t>192 000 000</a:t>
                       </a:r>
                       <a:endParaRPr lang="en-US" sz="950" dirty="0">
                         <a:latin typeface="Calibri" charset="0"/>
@@ -25391,7 +25391,7 @@
                           <a:ea typeface="Calibri" pitchFamily="34" charset="-122"/>
                           <a:cs typeface="Calibri" pitchFamily="34" charset="-120"/>
                         </a:rPr>
-                        <a:t>2.67%</a:t>
+                        <a:t>1.07%</a:t>
                       </a:r>
                       <a:endParaRPr lang="en-US" sz="950" dirty="0">
                         <a:latin typeface="Calibri" charset="0"/>
@@ -25665,7 +25665,7 @@
                           <a:ea typeface="Calibri" pitchFamily="34" charset="-122"/>
                           <a:cs typeface="Calibri" pitchFamily="34" charset="-120"/>
                         </a:rPr>
-                        <a:t>9 040 000 000</a:t>
+                        <a:t>3 616 000 000</a:t>
                       </a:r>
                       <a:endParaRPr lang="en-US" sz="950" dirty="0">
                         <a:latin typeface="Calibri" charset="0"/>
@@ -25733,7 +25733,7 @@
                           <a:ea typeface="Calibri" pitchFamily="34" charset="-122"/>
                           <a:cs typeface="Calibri" pitchFamily="34" charset="-120"/>
                         </a:rPr>
-                        <a:t>3.28%</a:t>
+                        <a:t>1.31%</a:t>
                       </a:r>
                       <a:endParaRPr lang="en-US" sz="950" dirty="0">
                         <a:latin typeface="Calibri" charset="0"/>
@@ -25801,7 +25801,7 @@
                           <a:ea typeface="Calibri" pitchFamily="34" charset="-122"/>
                           <a:cs typeface="Calibri" pitchFamily="34" charset="-120"/>
                         </a:rPr>
-                        <a:t>9.04 mlrd sof foyda</a:t>
+                        <a:t>3.616 mlrd sof foyda</a:t>
                       </a:r>
                       <a:endParaRPr lang="en-US" sz="950" dirty="0">
                         <a:latin typeface="Calibri" charset="0"/>
@@ -35502,7 +35502,7 @@
       </p:grpSpPr>
       <p:pic>
         <p:nvPicPr>
-          <p:cNvPr id="2" name="Image 0" descr="C:\Users\WECAN\Downloads\akfa invest\assets\construction.jpg">    </p:cNvPr>
+          <p:cNvPr id="2" name="Image 0" descr="C:\Users\WECAN\Downloads\akfa invest 6040 new\assets\construction.jpg">    </p:cNvPr>
           <p:cNvPicPr>
             <a:picLocks noChangeAspect="1"/>
           </p:cNvPicPr>
@@ -39701,7 +39701,7 @@
       </p:sp>
       <p:pic>
         <p:nvPicPr>
-          <p:cNvPr id="5" name="Image 0" descr="C:\Users\WECAN\Downloads\akfa invest\assets\warehouse.jpg">    </p:cNvPr>
+          <p:cNvPr id="5" name="Image 0" descr="C:\Users\WECAN\Downloads\akfa invest 6040 new\assets\warehouse.jpg">    </p:cNvPr>
           <p:cNvPicPr>
             <a:picLocks noChangeAspect="1"/>
           </p:cNvPicPr>

--- a/AKFA_Dilerlik_Investor_Prezentatsiyasi.pptx
+++ b/AKFA_Dilerlik_Investor_Prezentatsiyasi.pptx
@@ -5415,7 +5415,7 @@
       </p:grpSpPr>
       <p:pic>
         <p:nvPicPr>
-          <p:cNvPr id="2" name="Image 0" descr="C:\Users\WECAN\Downloads\akfa invest 6040 new\assets\hero-bg.jpg">    </p:cNvPr>
+          <p:cNvPr id="2" name="Image 0" descr="/home/user/akfa-invest-6040/assets/hero-bg.jpg">    </p:cNvPr>
           <p:cNvPicPr>
             <a:picLocks noChangeAspect="1"/>
           </p:cNvPicPr>
@@ -30685,7 +30685,7 @@
                           <a:ea typeface="Calibri" pitchFamily="34" charset="-122"/>
                           <a:cs typeface="Calibri" pitchFamily="34" charset="-120"/>
                         </a:rPr>
-                        <a:t>$140,800</a:t>
+                        <a:t>$56,320</a:t>
                       </a:r>
                       <a:endParaRPr lang="en-US" sz="950" dirty="0">
                         <a:latin typeface="Calibri" charset="0"/>
@@ -30753,7 +30753,7 @@
                           <a:ea typeface="Calibri" pitchFamily="34" charset="-122"/>
                           <a:cs typeface="Calibri" pitchFamily="34" charset="-120"/>
                         </a:rPr>
-                        <a:t>7.0% / yil</a:t>
+                        <a:t>2.8% / yil</a:t>
                       </a:r>
                       <a:endParaRPr lang="en-US" sz="950" dirty="0">
                         <a:latin typeface="Calibri" charset="0"/>
@@ -30821,7 +30821,7 @@
                           <a:ea typeface="Calibri" pitchFamily="34" charset="-122"/>
                           <a:cs typeface="Calibri" pitchFamily="34" charset="-120"/>
                         </a:rPr>
-                        <a:t>14.2 yil</a:t>
+                        <a:t>35.5 yil</a:t>
                       </a:r>
                       <a:endParaRPr lang="en-US" sz="950" dirty="0">
                         <a:latin typeface="Calibri" charset="0"/>
@@ -31095,7 +31095,7 @@
                           <a:ea typeface="Calibri" pitchFamily="34" charset="-122"/>
                           <a:cs typeface="Calibri" pitchFamily="34" charset="-120"/>
                         </a:rPr>
-                        <a:t>$176,000</a:t>
+                        <a:t>$70,400</a:t>
                       </a:r>
                       <a:endParaRPr lang="en-US" sz="950" dirty="0">
                         <a:latin typeface="Calibri" charset="0"/>
@@ -31163,7 +31163,7 @@
                           <a:ea typeface="Calibri" pitchFamily="34" charset="-122"/>
                           <a:cs typeface="Calibri" pitchFamily="34" charset="-120"/>
                         </a:rPr>
-                        <a:t>8.8% / yil</a:t>
+                        <a:t>3.5% / yil</a:t>
                       </a:r>
                       <a:endParaRPr lang="en-US" sz="950" dirty="0">
                         <a:latin typeface="Calibri" charset="0"/>
@@ -31231,7 +31231,7 @@
                           <a:ea typeface="Calibri" pitchFamily="34" charset="-122"/>
                           <a:cs typeface="Calibri" pitchFamily="34" charset="-120"/>
                         </a:rPr>
-                        <a:t>11.4 yil</a:t>
+                        <a:t>28.4 yil</a:t>
                       </a:r>
                       <a:endParaRPr lang="en-US" sz="950" dirty="0">
                         <a:latin typeface="Calibri" charset="0"/>
@@ -31505,7 +31505,7 @@
                           <a:ea typeface="Calibri" pitchFamily="34" charset="-122"/>
                           <a:cs typeface="Calibri" pitchFamily="34" charset="-120"/>
                         </a:rPr>
-                        <a:t>$211,200</a:t>
+                        <a:t>$84,480</a:t>
                       </a:r>
                       <a:endParaRPr lang="en-US" sz="950" dirty="0">
                         <a:latin typeface="Calibri" charset="0"/>
@@ -31573,7 +31573,7 @@
                           <a:ea typeface="Calibri" pitchFamily="34" charset="-122"/>
                           <a:cs typeface="Calibri" pitchFamily="34" charset="-120"/>
                         </a:rPr>
-                        <a:t>10.6% / yil</a:t>
+                        <a:t>4.2% / yil</a:t>
                       </a:r>
                       <a:endParaRPr lang="en-US" sz="950" dirty="0">
                         <a:latin typeface="Calibri" charset="0"/>
@@ -31641,7 +31641,7 @@
                           <a:ea typeface="Calibri" pitchFamily="34" charset="-122"/>
                           <a:cs typeface="Calibri" pitchFamily="34" charset="-120"/>
                         </a:rPr>
-                        <a:t>9.5 yil</a:t>
+                        <a:t>23.7 yil</a:t>
                       </a:r>
                       <a:endParaRPr lang="en-US" sz="950" dirty="0">
                         <a:latin typeface="Calibri" charset="0"/>
@@ -31915,7 +31915,7 @@
                           <a:ea typeface="Calibri" pitchFamily="34" charset="-122"/>
                           <a:cs typeface="Calibri" pitchFamily="34" charset="-120"/>
                         </a:rPr>
-                        <a:t>$246,400</a:t>
+                        <a:t>$98,560</a:t>
                       </a:r>
                       <a:endParaRPr lang="en-US" sz="950" dirty="0">
                         <a:latin typeface="Calibri" charset="0"/>
@@ -31983,7 +31983,7 @@
                           <a:ea typeface="Calibri" pitchFamily="34" charset="-122"/>
                           <a:cs typeface="Calibri" pitchFamily="34" charset="-120"/>
                         </a:rPr>
-                        <a:t>12.3% / yil</a:t>
+                        <a:t>4.9% / yil</a:t>
                       </a:r>
                       <a:endParaRPr lang="en-US" sz="950" dirty="0">
                         <a:latin typeface="Calibri" charset="0"/>
@@ -32051,7 +32051,7 @@
                           <a:ea typeface="Calibri" pitchFamily="34" charset="-122"/>
                           <a:cs typeface="Calibri" pitchFamily="34" charset="-120"/>
                         </a:rPr>
-                        <a:t>8.1 yil</a:t>
+                        <a:t>20.3 yil</a:t>
                       </a:r>
                       <a:endParaRPr lang="en-US" sz="950" dirty="0">
                         <a:latin typeface="Calibri" charset="0"/>
@@ -32325,7 +32325,7 @@
                           <a:ea typeface="Calibri" pitchFamily="34" charset="-122"/>
                           <a:cs typeface="Calibri" pitchFamily="34" charset="-120"/>
                         </a:rPr>
-                        <a:t>$281,600</a:t>
+                        <a:t>$112,640</a:t>
                       </a:r>
                       <a:endParaRPr lang="en-US" sz="950" dirty="0">
                         <a:latin typeface="Calibri" charset="0"/>
@@ -32393,7 +32393,7 @@
                           <a:ea typeface="Calibri" pitchFamily="34" charset="-122"/>
                           <a:cs typeface="Calibri" pitchFamily="34" charset="-120"/>
                         </a:rPr>
-                        <a:t>14.1% / yil</a:t>
+                        <a:t>5.6% / yil</a:t>
                       </a:r>
                       <a:endParaRPr lang="en-US" sz="950" dirty="0">
                         <a:latin typeface="Calibri" charset="0"/>
@@ -32461,7 +32461,7 @@
                           <a:ea typeface="Calibri" pitchFamily="34" charset="-122"/>
                           <a:cs typeface="Calibri" pitchFamily="34" charset="-120"/>
                         </a:rPr>
-                        <a:t>7.1 yil</a:t>
+                        <a:t>17.8 yil</a:t>
                       </a:r>
                       <a:endParaRPr lang="en-US" sz="950" dirty="0">
                         <a:latin typeface="Calibri" charset="0"/>
@@ -35502,7 +35502,7 @@
       </p:grpSpPr>
       <p:pic>
         <p:nvPicPr>
-          <p:cNvPr id="2" name="Image 0" descr="C:\Users\WECAN\Downloads\akfa invest 6040 new\assets\construction.jpg">    </p:cNvPr>
+          <p:cNvPr id="2" name="Image 0" descr="/home/user/akfa-invest-6040/assets/construction.jpg">    </p:cNvPr>
           <p:cNvPicPr>
             <a:picLocks noChangeAspect="1"/>
           </p:cNvPicPr>
@@ -39701,7 +39701,7 @@
       </p:sp>
       <p:pic>
         <p:nvPicPr>
-          <p:cNvPr id="5" name="Image 0" descr="C:\Users\WECAN\Downloads\akfa invest 6040 new\assets\warehouse.jpg">    </p:cNvPr>
+          <p:cNvPr id="5" name="Image 0" descr="/home/user/akfa-invest-6040/assets/warehouse.jpg">    </p:cNvPr>
           <p:cNvPicPr>
             <a:picLocks noChangeAspect="1"/>
           </p:cNvPicPr>
